--- a/Final/Figures/wave_vector.pptx
+++ b/Final/Figures/wave_vector.pptx
@@ -244,7 +244,7 @@
           <a:p>
             <a:fld id="{96B2E576-E176-4636-8106-C6403D35D5FE}" type="datetimeFigureOut">
               <a:rPr lang="zh-TW" altLang="en-US" smtClean="0"/>
-              <a:t>2026/6/9</a:t>
+              <a:t>2026/7/4</a:t>
             </a:fld>
             <a:endParaRPr lang="zh-TW" altLang="en-US"/>
           </a:p>
@@ -414,7 +414,7 @@
           <a:p>
             <a:fld id="{96B2E576-E176-4636-8106-C6403D35D5FE}" type="datetimeFigureOut">
               <a:rPr lang="zh-TW" altLang="en-US" smtClean="0"/>
-              <a:t>2026/6/9</a:t>
+              <a:t>2026/7/4</a:t>
             </a:fld>
             <a:endParaRPr lang="zh-TW" altLang="en-US"/>
           </a:p>
@@ -594,7 +594,7 @@
           <a:p>
             <a:fld id="{96B2E576-E176-4636-8106-C6403D35D5FE}" type="datetimeFigureOut">
               <a:rPr lang="zh-TW" altLang="en-US" smtClean="0"/>
-              <a:t>2026/6/9</a:t>
+              <a:t>2026/7/4</a:t>
             </a:fld>
             <a:endParaRPr lang="zh-TW" altLang="en-US"/>
           </a:p>
@@ -764,7 +764,7 @@
           <a:p>
             <a:fld id="{96B2E576-E176-4636-8106-C6403D35D5FE}" type="datetimeFigureOut">
               <a:rPr lang="zh-TW" altLang="en-US" smtClean="0"/>
-              <a:t>2026/6/9</a:t>
+              <a:t>2026/7/4</a:t>
             </a:fld>
             <a:endParaRPr lang="zh-TW" altLang="en-US"/>
           </a:p>
@@ -1008,7 +1008,7 @@
           <a:p>
             <a:fld id="{96B2E576-E176-4636-8106-C6403D35D5FE}" type="datetimeFigureOut">
               <a:rPr lang="zh-TW" altLang="en-US" smtClean="0"/>
-              <a:t>2026/6/9</a:t>
+              <a:t>2026/7/4</a:t>
             </a:fld>
             <a:endParaRPr lang="zh-TW" altLang="en-US"/>
           </a:p>
@@ -1240,7 +1240,7 @@
           <a:p>
             <a:fld id="{96B2E576-E176-4636-8106-C6403D35D5FE}" type="datetimeFigureOut">
               <a:rPr lang="zh-TW" altLang="en-US" smtClean="0"/>
-              <a:t>2026/6/9</a:t>
+              <a:t>2026/7/4</a:t>
             </a:fld>
             <a:endParaRPr lang="zh-TW" altLang="en-US"/>
           </a:p>
@@ -1607,7 +1607,7 @@
           <a:p>
             <a:fld id="{96B2E576-E176-4636-8106-C6403D35D5FE}" type="datetimeFigureOut">
               <a:rPr lang="zh-TW" altLang="en-US" smtClean="0"/>
-              <a:t>2026/6/9</a:t>
+              <a:t>2026/7/4</a:t>
             </a:fld>
             <a:endParaRPr lang="zh-TW" altLang="en-US"/>
           </a:p>
@@ -1725,7 +1725,7 @@
           <a:p>
             <a:fld id="{96B2E576-E176-4636-8106-C6403D35D5FE}" type="datetimeFigureOut">
               <a:rPr lang="zh-TW" altLang="en-US" smtClean="0"/>
-              <a:t>2026/6/9</a:t>
+              <a:t>2026/7/4</a:t>
             </a:fld>
             <a:endParaRPr lang="zh-TW" altLang="en-US"/>
           </a:p>
@@ -1820,7 +1820,7 @@
           <a:p>
             <a:fld id="{96B2E576-E176-4636-8106-C6403D35D5FE}" type="datetimeFigureOut">
               <a:rPr lang="zh-TW" altLang="en-US" smtClean="0"/>
-              <a:t>2026/6/9</a:t>
+              <a:t>2026/7/4</a:t>
             </a:fld>
             <a:endParaRPr lang="zh-TW" altLang="en-US"/>
           </a:p>
@@ -2097,7 +2097,7 @@
           <a:p>
             <a:fld id="{96B2E576-E176-4636-8106-C6403D35D5FE}" type="datetimeFigureOut">
               <a:rPr lang="zh-TW" altLang="en-US" smtClean="0"/>
-              <a:t>2026/6/9</a:t>
+              <a:t>2026/7/4</a:t>
             </a:fld>
             <a:endParaRPr lang="zh-TW" altLang="en-US"/>
           </a:p>
@@ -2354,7 +2354,7 @@
           <a:p>
             <a:fld id="{96B2E576-E176-4636-8106-C6403D35D5FE}" type="datetimeFigureOut">
               <a:rPr lang="zh-TW" altLang="en-US" smtClean="0"/>
-              <a:t>2026/6/9</a:t>
+              <a:t>2026/7/4</a:t>
             </a:fld>
             <a:endParaRPr lang="zh-TW" altLang="en-US"/>
           </a:p>
@@ -2567,7 +2567,7 @@
           <a:p>
             <a:fld id="{96B2E576-E176-4636-8106-C6403D35D5FE}" type="datetimeFigureOut">
               <a:rPr lang="zh-TW" altLang="en-US" smtClean="0"/>
-              <a:t>2026/6/9</a:t>
+              <a:t>2026/7/4</a:t>
             </a:fld>
             <a:endParaRPr lang="zh-TW" altLang="en-US"/>
           </a:p>
@@ -3462,8 +3462,8 @@
           </a:fontRef>
         </p:style>
       </p:cxnSp>
-      <mc:AlternateContent xmlns:mc="http://schemas.openxmlformats.org/markup-compatibility/2006">
-        <mc:Choice xmlns:a14="http://schemas.microsoft.com/office/drawing/2010/main" Requires="a14">
+      <mc:AlternateContent xmlns:mc="http://schemas.openxmlformats.org/markup-compatibility/2006" xmlns:a14="http://schemas.microsoft.com/office/drawing/2010/main">
+        <mc:Choice Requires="a14">
           <p:sp>
             <p:nvSpPr>
               <p:cNvPr id="35" name="文字方塊 34">
@@ -3532,7 +3532,7 @@
             </p:txBody>
           </p:sp>
         </mc:Choice>
-        <mc:Fallback>
+        <mc:Fallback xmlns="">
           <p:sp>
             <p:nvSpPr>
               <p:cNvPr id="35" name="文字方塊 34">
@@ -3577,8 +3577,8 @@
           </p:sp>
         </mc:Fallback>
       </mc:AlternateContent>
-      <mc:AlternateContent xmlns:mc="http://schemas.openxmlformats.org/markup-compatibility/2006">
-        <mc:Choice xmlns:a14="http://schemas.microsoft.com/office/drawing/2010/main" Requires="a14">
+      <mc:AlternateContent xmlns:mc="http://schemas.openxmlformats.org/markup-compatibility/2006" xmlns:a14="http://schemas.microsoft.com/office/drawing/2010/main">
+        <mc:Choice Requires="a14">
           <p:sp>
             <p:nvSpPr>
               <p:cNvPr id="36" name="文字方塊 35">
@@ -3666,7 +3666,7 @@
             </p:txBody>
           </p:sp>
         </mc:Choice>
-        <mc:Fallback>
+        <mc:Fallback xmlns="">
           <p:sp>
             <p:nvSpPr>
               <p:cNvPr id="36" name="文字方塊 35">
@@ -3711,8 +3711,8 @@
           </p:sp>
         </mc:Fallback>
       </mc:AlternateContent>
-      <mc:AlternateContent xmlns:mc="http://schemas.openxmlformats.org/markup-compatibility/2006">
-        <mc:Choice xmlns:a14="http://schemas.microsoft.com/office/drawing/2010/main" Requires="a14">
+      <mc:AlternateContent xmlns:mc="http://schemas.openxmlformats.org/markup-compatibility/2006" xmlns:a14="http://schemas.microsoft.com/office/drawing/2010/main">
+        <mc:Choice Requires="a14">
           <p:sp>
             <p:nvSpPr>
               <p:cNvPr id="37" name="文字方塊 36">
@@ -3768,7 +3768,7 @@
             </p:txBody>
           </p:sp>
         </mc:Choice>
-        <mc:Fallback>
+        <mc:Fallback xmlns="">
           <p:sp>
             <p:nvSpPr>
               <p:cNvPr id="37" name="文字方塊 36">
@@ -3813,8 +3813,8 @@
           </p:sp>
         </mc:Fallback>
       </mc:AlternateContent>
-      <mc:AlternateContent xmlns:mc="http://schemas.openxmlformats.org/markup-compatibility/2006">
-        <mc:Choice xmlns:a14="http://schemas.microsoft.com/office/drawing/2010/main" Requires="a14">
+      <mc:AlternateContent xmlns:mc="http://schemas.openxmlformats.org/markup-compatibility/2006" xmlns:a14="http://schemas.microsoft.com/office/drawing/2010/main">
+        <mc:Choice Requires="a14">
           <p:sp>
             <p:nvSpPr>
               <p:cNvPr id="39" name="文字方塊 38">
@@ -3895,7 +3895,7 @@
             </p:txBody>
           </p:sp>
         </mc:Choice>
-        <mc:Fallback>
+        <mc:Fallback xmlns="">
           <p:sp>
             <p:nvSpPr>
               <p:cNvPr id="39" name="文字方塊 38">
@@ -4072,8 +4072,8 @@
           </p:spPr>
         </p:pic>
       </p:grpSp>
-      <mc:AlternateContent xmlns:mc="http://schemas.openxmlformats.org/markup-compatibility/2006">
-        <mc:Choice xmlns:a14="http://schemas.microsoft.com/office/drawing/2010/main" Requires="a14">
+      <mc:AlternateContent xmlns:mc="http://schemas.openxmlformats.org/markup-compatibility/2006" xmlns:a14="http://schemas.microsoft.com/office/drawing/2010/main">
+        <mc:Choice Requires="a14">
           <p:sp>
             <p:nvSpPr>
               <p:cNvPr id="53" name="文字方塊 52">
@@ -4142,7 +4142,7 @@
             </p:txBody>
           </p:sp>
         </mc:Choice>
-        <mc:Fallback>
+        <mc:Fallback xmlns="">
           <p:sp>
             <p:nvSpPr>
               <p:cNvPr id="53" name="文字方塊 52">
@@ -4187,8 +4187,8 @@
           </p:sp>
         </mc:Fallback>
       </mc:AlternateContent>
-      <mc:AlternateContent xmlns:mc="http://schemas.openxmlformats.org/markup-compatibility/2006">
-        <mc:Choice xmlns:a14="http://schemas.microsoft.com/office/drawing/2010/main" Requires="a14">
+      <mc:AlternateContent xmlns:mc="http://schemas.openxmlformats.org/markup-compatibility/2006" xmlns:a14="http://schemas.microsoft.com/office/drawing/2010/main">
+        <mc:Choice Requires="a14">
           <p:sp>
             <p:nvSpPr>
               <p:cNvPr id="38" name="文字方塊 37">
@@ -4250,7 +4250,7 @@
             </p:txBody>
           </p:sp>
         </mc:Choice>
-        <mc:Fallback>
+        <mc:Fallback xmlns="">
           <p:sp>
             <p:nvSpPr>
               <p:cNvPr id="38" name="文字方塊 37">
@@ -5395,12 +5395,619 @@
           <a:chExt cx="0" cy="0"/>
         </a:xfrm>
       </p:grpSpPr>
+      <p:cxnSp>
+        <p:nvCxnSpPr>
+          <p:cNvPr id="40" name="直線接點 39">
+            <a:extLst>
+              <a:ext uri="{FF2B5EF4-FFF2-40B4-BE49-F238E27FC236}">
+                <a16:creationId xmlns:a16="http://schemas.microsoft.com/office/drawing/2014/main" id="{177EA501-BF83-473A-89CC-71704F8BC3AE}"/>
+              </a:ext>
+            </a:extLst>
+          </p:cNvPr>
+          <p:cNvCxnSpPr>
+            <a:cxnSpLocks/>
+          </p:cNvCxnSpPr>
+          <p:nvPr/>
+        </p:nvCxnSpPr>
+        <p:spPr>
+          <a:xfrm>
+            <a:off x="4272939" y="3723568"/>
+            <a:ext cx="1828001" cy="0"/>
+          </a:xfrm>
+          <a:prstGeom prst="line">
+            <a:avLst/>
+          </a:prstGeom>
+          <a:ln w="38100">
+            <a:headEnd type="none" w="sm" len="sm"/>
+            <a:tailEnd type="stealth" w="lg" len="lg"/>
+          </a:ln>
+        </p:spPr>
+        <p:style>
+          <a:lnRef idx="3">
+            <a:schemeClr val="dk1"/>
+          </a:lnRef>
+          <a:fillRef idx="0">
+            <a:schemeClr val="dk1"/>
+          </a:fillRef>
+          <a:effectRef idx="2">
+            <a:schemeClr val="dk1"/>
+          </a:effectRef>
+          <a:fontRef idx="minor">
+            <a:schemeClr val="tx1"/>
+          </a:fontRef>
+        </p:style>
+      </p:cxnSp>
+      <p:cxnSp>
+        <p:nvCxnSpPr>
+          <p:cNvPr id="64" name="直線接點 63">
+            <a:extLst>
+              <a:ext uri="{FF2B5EF4-FFF2-40B4-BE49-F238E27FC236}">
+                <a16:creationId xmlns:a16="http://schemas.microsoft.com/office/drawing/2014/main" id="{A99C7E62-7554-4E77-9C31-CBFD9E4B1D53}"/>
+              </a:ext>
+            </a:extLst>
+          </p:cNvPr>
+          <p:cNvCxnSpPr>
+            <a:cxnSpLocks/>
+          </p:cNvCxnSpPr>
+          <p:nvPr/>
+        </p:nvCxnSpPr>
+        <p:spPr>
+          <a:xfrm flipH="1">
+            <a:off x="3617635" y="3710868"/>
+            <a:ext cx="680704" cy="778072"/>
+          </a:xfrm>
+          <a:prstGeom prst="line">
+            <a:avLst/>
+          </a:prstGeom>
+          <a:ln w="38100">
+            <a:headEnd type="none" w="sm" len="sm"/>
+            <a:tailEnd type="stealth" w="lg" len="lg"/>
+          </a:ln>
+        </p:spPr>
+        <p:style>
+          <a:lnRef idx="3">
+            <a:schemeClr val="dk1"/>
+          </a:lnRef>
+          <a:fillRef idx="0">
+            <a:schemeClr val="dk1"/>
+          </a:fillRef>
+          <a:effectRef idx="2">
+            <a:schemeClr val="dk1"/>
+          </a:effectRef>
+          <a:fontRef idx="minor">
+            <a:schemeClr val="tx1"/>
+          </a:fontRef>
+        </p:style>
+      </p:cxnSp>
+      <p:cxnSp>
+        <p:nvCxnSpPr>
+          <p:cNvPr id="67" name="直線接點 66">
+            <a:extLst>
+              <a:ext uri="{FF2B5EF4-FFF2-40B4-BE49-F238E27FC236}">
+                <a16:creationId xmlns:a16="http://schemas.microsoft.com/office/drawing/2014/main" id="{F9B51E7A-D0E3-456A-8AFF-CFC0CB46E4BB}"/>
+              </a:ext>
+            </a:extLst>
+          </p:cNvPr>
+          <p:cNvCxnSpPr>
+            <a:cxnSpLocks/>
+          </p:cNvCxnSpPr>
+          <p:nvPr/>
+        </p:nvCxnSpPr>
+        <p:spPr>
+          <a:xfrm>
+            <a:off x="4272939" y="2459968"/>
+            <a:ext cx="0" cy="1263600"/>
+          </a:xfrm>
+          <a:prstGeom prst="line">
+            <a:avLst/>
+          </a:prstGeom>
+          <a:ln w="38100">
+            <a:headEnd type="stealth" w="lg" len="lg"/>
+            <a:tailEnd type="none" w="lg" len="lg"/>
+          </a:ln>
+        </p:spPr>
+        <p:style>
+          <a:lnRef idx="3">
+            <a:schemeClr val="dk1"/>
+          </a:lnRef>
+          <a:fillRef idx="0">
+            <a:schemeClr val="dk1"/>
+          </a:fillRef>
+          <a:effectRef idx="2">
+            <a:schemeClr val="dk1"/>
+          </a:effectRef>
+          <a:fontRef idx="minor">
+            <a:schemeClr val="tx1"/>
+          </a:fontRef>
+        </p:style>
+      </p:cxnSp>
+      <mc:AlternateContent xmlns:mc="http://schemas.openxmlformats.org/markup-compatibility/2006">
+        <mc:Choice xmlns:a14="http://schemas.microsoft.com/office/drawing/2010/main" Requires="a14">
+          <p:sp>
+            <p:nvSpPr>
+              <p:cNvPr id="69" name="文字方塊 68">
+                <a:extLst>
+                  <a:ext uri="{FF2B5EF4-FFF2-40B4-BE49-F238E27FC236}">
+                    <a16:creationId xmlns:a16="http://schemas.microsoft.com/office/drawing/2014/main" id="{A381AF93-E1EE-4C2E-A51E-34BEBBBB2DBB}"/>
+                  </a:ext>
+                </a:extLst>
+              </p:cNvPr>
+              <p:cNvSpPr txBox="1"/>
+              <p:nvPr/>
+            </p:nvSpPr>
+            <p:spPr>
+              <a:xfrm>
+                <a:off x="4057059" y="2017347"/>
+                <a:ext cx="499134" cy="492443"/>
+              </a:xfrm>
+              <a:prstGeom prst="rect">
+                <a:avLst/>
+              </a:prstGeom>
+              <a:noFill/>
+            </p:spPr>
+            <p:txBody>
+              <a:bodyPr wrap="square" rtlCol="0">
+                <a:spAutoFit/>
+              </a:bodyPr>
+              <a:lstStyle/>
+              <a:p>
+                <a:pPr/>
+                <a14:m>
+                  <m:oMathPara xmlns:m="http://schemas.openxmlformats.org/officeDocument/2006/math">
+                    <m:oMathParaPr>
+                      <m:jc m:val="centerGroup"/>
+                    </m:oMathParaPr>
+                    <m:oMath xmlns:m="http://schemas.openxmlformats.org/officeDocument/2006/math">
+                      <m:sSub>
+                        <m:sSubPr>
+                          <m:ctrlPr>
+                            <a:rPr lang="en-US" altLang="zh-TW" sz="2600" i="1" smtClean="0">
+                              <a:latin typeface="Cambria Math" panose="02040503050406030204" pitchFamily="18" charset="0"/>
+                            </a:rPr>
+                          </m:ctrlPr>
+                        </m:sSubPr>
+                        <m:e>
+                          <m:r>
+                            <a:rPr lang="en-US" altLang="zh-TW" sz="2600" b="1" i="1">
+                              <a:latin typeface="Cambria Math" panose="02040503050406030204" pitchFamily="18" charset="0"/>
+                            </a:rPr>
+                            <m:t>𝒒</m:t>
+                          </m:r>
+                        </m:e>
+                        <m:sub>
+                          <m:r>
+                            <a:rPr lang="en-US" altLang="zh-TW" sz="2600" b="0" i="1" smtClean="0">
+                              <a:latin typeface="Cambria Math" panose="02040503050406030204" pitchFamily="18" charset="0"/>
+                            </a:rPr>
+                            <m:t>𝑥</m:t>
+                          </m:r>
+                        </m:sub>
+                      </m:sSub>
+                    </m:oMath>
+                  </m:oMathPara>
+                </a14:m>
+                <a:endParaRPr lang="zh-TW" altLang="en-US" sz="2600" dirty="0">
+                  <a:latin typeface="Times New Roman" panose="02020603050405020304" pitchFamily="18" charset="0"/>
+                  <a:cs typeface="Times New Roman" panose="02020603050405020304" pitchFamily="18" charset="0"/>
+                </a:endParaRPr>
+              </a:p>
+            </p:txBody>
+          </p:sp>
+        </mc:Choice>
+        <mc:Fallback>
+          <p:sp>
+            <p:nvSpPr>
+              <p:cNvPr id="69" name="文字方塊 68">
+                <a:extLst>
+                  <a:ext uri="{FF2B5EF4-FFF2-40B4-BE49-F238E27FC236}">
+                    <a16:creationId xmlns:a16="http://schemas.microsoft.com/office/drawing/2014/main" id="{A381AF93-E1EE-4C2E-A51E-34BEBBBB2DBB}"/>
+                  </a:ext>
+                </a:extLst>
+              </p:cNvPr>
+              <p:cNvSpPr txBox="1">
+                <a:spLocks noRot="1" noChangeAspect="1" noMove="1" noResize="1" noEditPoints="1" noAdjustHandles="1" noChangeArrowheads="1" noChangeShapeType="1" noTextEdit="1"/>
+              </p:cNvSpPr>
+              <p:nvPr/>
+            </p:nvSpPr>
+            <p:spPr>
+              <a:xfrm>
+                <a:off x="4057059" y="2017347"/>
+                <a:ext cx="499134" cy="492443"/>
+              </a:xfrm>
+              <a:prstGeom prst="rect">
+                <a:avLst/>
+              </a:prstGeom>
+              <a:blipFill>
+                <a:blip r:embed="rId2"/>
+                <a:stretch>
+                  <a:fillRect/>
+                </a:stretch>
+              </a:blipFill>
+            </p:spPr>
+            <p:txBody>
+              <a:bodyPr/>
+              <a:lstStyle/>
+              <a:p>
+                <a:r>
+                  <a:rPr lang="zh-TW" altLang="en-US">
+                    <a:noFill/>
+                  </a:rPr>
+                  <a:t> </a:t>
+                </a:r>
+              </a:p>
+            </p:txBody>
+          </p:sp>
+        </mc:Fallback>
+      </mc:AlternateContent>
+      <mc:AlternateContent xmlns:mc="http://schemas.openxmlformats.org/markup-compatibility/2006">
+        <mc:Choice xmlns:a14="http://schemas.microsoft.com/office/drawing/2010/main" Requires="a14">
+          <p:sp>
+            <p:nvSpPr>
+              <p:cNvPr id="70" name="文字方塊 69">
+                <a:extLst>
+                  <a:ext uri="{FF2B5EF4-FFF2-40B4-BE49-F238E27FC236}">
+                    <a16:creationId xmlns:a16="http://schemas.microsoft.com/office/drawing/2014/main" id="{6CE79A81-1D77-4F04-AF6B-2D5D313FDCF6}"/>
+                  </a:ext>
+                </a:extLst>
+              </p:cNvPr>
+              <p:cNvSpPr txBox="1"/>
+              <p:nvPr/>
+            </p:nvSpPr>
+            <p:spPr>
+              <a:xfrm>
+                <a:off x="3242050" y="4316599"/>
+                <a:ext cx="499134" cy="524054"/>
+              </a:xfrm>
+              <a:prstGeom prst="rect">
+                <a:avLst/>
+              </a:prstGeom>
+              <a:noFill/>
+            </p:spPr>
+            <p:txBody>
+              <a:bodyPr wrap="square" rtlCol="0">
+                <a:spAutoFit/>
+              </a:bodyPr>
+              <a:lstStyle/>
+              <a:p>
+                <a:pPr/>
+                <a14:m>
+                  <m:oMathPara xmlns:m="http://schemas.openxmlformats.org/officeDocument/2006/math">
+                    <m:oMathParaPr>
+                      <m:jc m:val="centerGroup"/>
+                    </m:oMathParaPr>
+                    <m:oMath xmlns:m="http://schemas.openxmlformats.org/officeDocument/2006/math">
+                      <m:sSub>
+                        <m:sSubPr>
+                          <m:ctrlPr>
+                            <a:rPr lang="en-US" altLang="zh-TW" sz="2600" i="1" smtClean="0">
+                              <a:latin typeface="Cambria Math" panose="02040503050406030204" pitchFamily="18" charset="0"/>
+                            </a:rPr>
+                          </m:ctrlPr>
+                        </m:sSubPr>
+                        <m:e>
+                          <m:r>
+                            <a:rPr lang="en-US" altLang="zh-TW" sz="2600" b="1" i="1">
+                              <a:latin typeface="Cambria Math" panose="02040503050406030204" pitchFamily="18" charset="0"/>
+                            </a:rPr>
+                            <m:t>𝒒</m:t>
+                          </m:r>
+                        </m:e>
+                        <m:sub>
+                          <m:r>
+                            <a:rPr lang="en-US" altLang="zh-TW" sz="2600" b="0" i="1" smtClean="0">
+                              <a:latin typeface="Cambria Math" panose="02040503050406030204" pitchFamily="18" charset="0"/>
+                            </a:rPr>
+                            <m:t>𝑦</m:t>
+                          </m:r>
+                        </m:sub>
+                      </m:sSub>
+                    </m:oMath>
+                  </m:oMathPara>
+                </a14:m>
+                <a:endParaRPr lang="zh-TW" altLang="en-US" sz="2600" dirty="0">
+                  <a:latin typeface="Times New Roman" panose="02020603050405020304" pitchFamily="18" charset="0"/>
+                  <a:cs typeface="Times New Roman" panose="02020603050405020304" pitchFamily="18" charset="0"/>
+                </a:endParaRPr>
+              </a:p>
+            </p:txBody>
+          </p:sp>
+        </mc:Choice>
+        <mc:Fallback>
+          <p:sp>
+            <p:nvSpPr>
+              <p:cNvPr id="70" name="文字方塊 69">
+                <a:extLst>
+                  <a:ext uri="{FF2B5EF4-FFF2-40B4-BE49-F238E27FC236}">
+                    <a16:creationId xmlns:a16="http://schemas.microsoft.com/office/drawing/2014/main" id="{6CE79A81-1D77-4F04-AF6B-2D5D313FDCF6}"/>
+                  </a:ext>
+                </a:extLst>
+              </p:cNvPr>
+              <p:cNvSpPr txBox="1">
+                <a:spLocks noRot="1" noChangeAspect="1" noMove="1" noResize="1" noEditPoints="1" noAdjustHandles="1" noChangeArrowheads="1" noChangeShapeType="1" noTextEdit="1"/>
+              </p:cNvSpPr>
+              <p:nvPr/>
+            </p:nvSpPr>
+            <p:spPr>
+              <a:xfrm>
+                <a:off x="3242050" y="4316599"/>
+                <a:ext cx="499134" cy="524054"/>
+              </a:xfrm>
+              <a:prstGeom prst="rect">
+                <a:avLst/>
+              </a:prstGeom>
+              <a:blipFill>
+                <a:blip r:embed="rId3"/>
+                <a:stretch>
+                  <a:fillRect/>
+                </a:stretch>
+              </a:blipFill>
+            </p:spPr>
+            <p:txBody>
+              <a:bodyPr/>
+              <a:lstStyle/>
+              <a:p>
+                <a:r>
+                  <a:rPr lang="zh-TW" altLang="en-US">
+                    <a:noFill/>
+                  </a:rPr>
+                  <a:t> </a:t>
+                </a:r>
+              </a:p>
+            </p:txBody>
+          </p:sp>
+        </mc:Fallback>
+      </mc:AlternateContent>
+      <mc:AlternateContent xmlns:mc="http://schemas.openxmlformats.org/markup-compatibility/2006">
+        <mc:Choice xmlns:a14="http://schemas.microsoft.com/office/drawing/2010/main" Requires="a14">
+          <p:sp>
+            <p:nvSpPr>
+              <p:cNvPr id="71" name="文字方塊 70">
+                <a:extLst>
+                  <a:ext uri="{FF2B5EF4-FFF2-40B4-BE49-F238E27FC236}">
+                    <a16:creationId xmlns:a16="http://schemas.microsoft.com/office/drawing/2014/main" id="{F758FAE2-DCF9-434C-8834-4F4BA34DC3B8}"/>
+                  </a:ext>
+                </a:extLst>
+              </p:cNvPr>
+              <p:cNvSpPr txBox="1"/>
+              <p:nvPr/>
+            </p:nvSpPr>
+            <p:spPr>
+              <a:xfrm>
+                <a:off x="6164817" y="3501590"/>
+                <a:ext cx="499134" cy="492443"/>
+              </a:xfrm>
+              <a:prstGeom prst="rect">
+                <a:avLst/>
+              </a:prstGeom>
+              <a:noFill/>
+            </p:spPr>
+            <p:txBody>
+              <a:bodyPr wrap="square" rtlCol="0">
+                <a:spAutoFit/>
+              </a:bodyPr>
+              <a:lstStyle/>
+              <a:p>
+                <a:pPr/>
+                <a14:m>
+                  <m:oMathPara xmlns:m="http://schemas.openxmlformats.org/officeDocument/2006/math">
+                    <m:oMathParaPr>
+                      <m:jc m:val="centerGroup"/>
+                    </m:oMathParaPr>
+                    <m:oMath xmlns:m="http://schemas.openxmlformats.org/officeDocument/2006/math">
+                      <m:sSub>
+                        <m:sSubPr>
+                          <m:ctrlPr>
+                            <a:rPr lang="en-US" altLang="zh-TW" sz="2600" i="1" smtClean="0">
+                              <a:latin typeface="Cambria Math" panose="02040503050406030204" pitchFamily="18" charset="0"/>
+                            </a:rPr>
+                          </m:ctrlPr>
+                        </m:sSubPr>
+                        <m:e>
+                          <m:r>
+                            <a:rPr lang="en-US" altLang="zh-TW" sz="2600" b="1" i="1">
+                              <a:latin typeface="Cambria Math" panose="02040503050406030204" pitchFamily="18" charset="0"/>
+                            </a:rPr>
+                            <m:t>𝒒</m:t>
+                          </m:r>
+                        </m:e>
+                        <m:sub>
+                          <m:r>
+                            <a:rPr lang="en-US" altLang="zh-TW" sz="2600" b="0" i="1" smtClean="0">
+                              <a:latin typeface="Cambria Math" panose="02040503050406030204" pitchFamily="18" charset="0"/>
+                            </a:rPr>
+                            <m:t>𝑧</m:t>
+                          </m:r>
+                        </m:sub>
+                      </m:sSub>
+                    </m:oMath>
+                  </m:oMathPara>
+                </a14:m>
+                <a:endParaRPr lang="zh-TW" altLang="en-US" sz="2600" dirty="0">
+                  <a:latin typeface="Times New Roman" panose="02020603050405020304" pitchFamily="18" charset="0"/>
+                  <a:cs typeface="Times New Roman" panose="02020603050405020304" pitchFamily="18" charset="0"/>
+                </a:endParaRPr>
+              </a:p>
+            </p:txBody>
+          </p:sp>
+        </mc:Choice>
+        <mc:Fallback>
+          <p:sp>
+            <p:nvSpPr>
+              <p:cNvPr id="71" name="文字方塊 70">
+                <a:extLst>
+                  <a:ext uri="{FF2B5EF4-FFF2-40B4-BE49-F238E27FC236}">
+                    <a16:creationId xmlns:a16="http://schemas.microsoft.com/office/drawing/2014/main" id="{F758FAE2-DCF9-434C-8834-4F4BA34DC3B8}"/>
+                  </a:ext>
+                </a:extLst>
+              </p:cNvPr>
+              <p:cNvSpPr txBox="1">
+                <a:spLocks noRot="1" noChangeAspect="1" noMove="1" noResize="1" noEditPoints="1" noAdjustHandles="1" noChangeArrowheads="1" noChangeShapeType="1" noTextEdit="1"/>
+              </p:cNvSpPr>
+              <p:nvPr/>
+            </p:nvSpPr>
+            <p:spPr>
+              <a:xfrm>
+                <a:off x="6164817" y="3501590"/>
+                <a:ext cx="499134" cy="492443"/>
+              </a:xfrm>
+              <a:prstGeom prst="rect">
+                <a:avLst/>
+              </a:prstGeom>
+              <a:blipFill>
+                <a:blip r:embed="rId4"/>
+                <a:stretch>
+                  <a:fillRect/>
+                </a:stretch>
+              </a:blipFill>
+            </p:spPr>
+            <p:txBody>
+              <a:bodyPr/>
+              <a:lstStyle/>
+              <a:p>
+                <a:r>
+                  <a:rPr lang="zh-TW" altLang="en-US">
+                    <a:noFill/>
+                  </a:rPr>
+                  <a:t> </a:t>
+                </a:r>
+              </a:p>
+            </p:txBody>
+          </p:sp>
+        </mc:Fallback>
+      </mc:AlternateContent>
+      <mc:AlternateContent xmlns:mc="http://schemas.openxmlformats.org/markup-compatibility/2006">
+        <mc:Choice xmlns:a14="http://schemas.microsoft.com/office/drawing/2010/main" Requires="a14">
+          <p:sp>
+            <p:nvSpPr>
+              <p:cNvPr id="87" name="文字方塊 86">
+                <a:extLst>
+                  <a:ext uri="{FF2B5EF4-FFF2-40B4-BE49-F238E27FC236}">
+                    <a16:creationId xmlns:a16="http://schemas.microsoft.com/office/drawing/2014/main" id="{56384483-2913-4BE8-AC0A-5F15247C44FF}"/>
+                  </a:ext>
+                </a:extLst>
+              </p:cNvPr>
+              <p:cNvSpPr txBox="1"/>
+              <p:nvPr/>
+            </p:nvSpPr>
+            <p:spPr>
+              <a:xfrm>
+                <a:off x="5384205" y="3039088"/>
+                <a:ext cx="568301" cy="492443"/>
+              </a:xfrm>
+              <a:prstGeom prst="rect">
+                <a:avLst/>
+              </a:prstGeom>
+              <a:noFill/>
+            </p:spPr>
+            <p:txBody>
+              <a:bodyPr wrap="square" rtlCol="0">
+                <a:spAutoFit/>
+              </a:bodyPr>
+              <a:lstStyle/>
+              <a:p>
+                <a:pPr/>
+                <a14:m>
+                  <m:oMathPara xmlns:m="http://schemas.openxmlformats.org/officeDocument/2006/math">
+                    <m:oMathParaPr>
+                      <m:jc m:val="centerGroup"/>
+                    </m:oMathParaPr>
+                    <m:oMath xmlns:m="http://schemas.openxmlformats.org/officeDocument/2006/math">
+                      <m:sSub>
+                        <m:sSubPr>
+                          <m:ctrlPr>
+                            <a:rPr lang="en-US" altLang="zh-TW" sz="2600" b="0" i="1" smtClean="0">
+                              <a:solidFill>
+                                <a:srgbClr val="DCAC36"/>
+                              </a:solidFill>
+                              <a:latin typeface="Cambria Math" panose="02040503050406030204" pitchFamily="18" charset="0"/>
+                            </a:rPr>
+                          </m:ctrlPr>
+                        </m:sSubPr>
+                        <m:e>
+                          <m:r>
+                            <a:rPr lang="en-US" altLang="zh-TW" sz="2600" b="1" i="1" smtClean="0">
+                              <a:solidFill>
+                                <a:srgbClr val="DCAC36"/>
+                              </a:solidFill>
+                              <a:latin typeface="Cambria Math" panose="02040503050406030204" pitchFamily="18" charset="0"/>
+                            </a:rPr>
+                            <m:t>𝒒</m:t>
+                          </m:r>
+                        </m:e>
+                        <m:sub>
+                          <m:r>
+                            <a:rPr lang="en-US" altLang="zh-TW" sz="2600" b="0" i="1" smtClean="0">
+                              <a:solidFill>
+                                <a:srgbClr val="DCAC36"/>
+                              </a:solidFill>
+                              <a:latin typeface="Cambria Math" panose="02040503050406030204" pitchFamily="18" charset="0"/>
+                            </a:rPr>
+                            <m:t>0</m:t>
+                          </m:r>
+                        </m:sub>
+                      </m:sSub>
+                    </m:oMath>
+                  </m:oMathPara>
+                </a14:m>
+                <a:endParaRPr lang="zh-TW" altLang="en-US" sz="2600" dirty="0">
+                  <a:latin typeface="Times New Roman" panose="02020603050405020304" pitchFamily="18" charset="0"/>
+                  <a:cs typeface="Times New Roman" panose="02020603050405020304" pitchFamily="18" charset="0"/>
+                </a:endParaRPr>
+              </a:p>
+            </p:txBody>
+          </p:sp>
+        </mc:Choice>
+        <mc:Fallback>
+          <p:sp>
+            <p:nvSpPr>
+              <p:cNvPr id="87" name="文字方塊 86">
+                <a:extLst>
+                  <a:ext uri="{FF2B5EF4-FFF2-40B4-BE49-F238E27FC236}">
+                    <a16:creationId xmlns:a16="http://schemas.microsoft.com/office/drawing/2014/main" id="{56384483-2913-4BE8-AC0A-5F15247C44FF}"/>
+                  </a:ext>
+                </a:extLst>
+              </p:cNvPr>
+              <p:cNvSpPr txBox="1">
+                <a:spLocks noRot="1" noChangeAspect="1" noMove="1" noResize="1" noEditPoints="1" noAdjustHandles="1" noChangeArrowheads="1" noChangeShapeType="1" noTextEdit="1"/>
+              </p:cNvSpPr>
+              <p:nvPr/>
+            </p:nvSpPr>
+            <p:spPr>
+              <a:xfrm>
+                <a:off x="5384205" y="3039088"/>
+                <a:ext cx="568301" cy="492443"/>
+              </a:xfrm>
+              <a:prstGeom prst="rect">
+                <a:avLst/>
+              </a:prstGeom>
+              <a:blipFill>
+                <a:blip r:embed="rId5"/>
+                <a:stretch>
+                  <a:fillRect/>
+                </a:stretch>
+              </a:blipFill>
+            </p:spPr>
+            <p:txBody>
+              <a:bodyPr/>
+              <a:lstStyle/>
+              <a:p>
+                <a:r>
+                  <a:rPr lang="zh-TW" altLang="en-US">
+                    <a:noFill/>
+                  </a:rPr>
+                  <a:t> </a:t>
+                </a:r>
+              </a:p>
+            </p:txBody>
+          </p:sp>
+        </mc:Fallback>
+      </mc:AlternateContent>
       <p:grpSp>
         <p:nvGrpSpPr>
-          <p:cNvPr id="3" name="群組 2">
+          <p:cNvPr id="45" name="群組 44">
             <a:extLst>
               <a:ext uri="{FF2B5EF4-FFF2-40B4-BE49-F238E27FC236}">
-                <a16:creationId xmlns:a16="http://schemas.microsoft.com/office/drawing/2014/main" id="{3C99CEB6-D17E-4962-835E-85D88A71691D}"/>
+                <a16:creationId xmlns:a16="http://schemas.microsoft.com/office/drawing/2014/main" id="{10715250-2128-407F-A045-4775B6464E3E}"/>
               </a:ext>
             </a:extLst>
           </p:cNvPr>
@@ -5408,752 +6015,124 @@
           <p:nvPr/>
         </p:nvGrpSpPr>
         <p:grpSpPr>
-          <a:xfrm>
-            <a:off x="3242050" y="2017347"/>
-            <a:ext cx="3421901" cy="2823306"/>
-            <a:chOff x="2499058" y="2152918"/>
-            <a:chExt cx="3421901" cy="2823306"/>
+          <a:xfrm rot="16200000">
+            <a:off x="4786833" y="2964660"/>
+            <a:ext cx="702702" cy="1506834"/>
+            <a:chOff x="1133021" y="599099"/>
+            <a:chExt cx="380213" cy="1270949"/>
           </a:xfrm>
         </p:grpSpPr>
-        <p:cxnSp>
-          <p:nvCxnSpPr>
-            <p:cNvPr id="40" name="直線接點 39">
+        <p:pic>
+          <p:nvPicPr>
+            <p:cNvPr id="46" name="圖片 45">
               <a:extLst>
                 <a:ext uri="{FF2B5EF4-FFF2-40B4-BE49-F238E27FC236}">
-                  <a16:creationId xmlns:a16="http://schemas.microsoft.com/office/drawing/2014/main" id="{177EA501-BF83-473A-89CC-71704F8BC3AE}"/>
+                  <a16:creationId xmlns:a16="http://schemas.microsoft.com/office/drawing/2014/main" id="{CE72AB36-17D2-40E6-9818-43D5B168917F}"/>
                 </a:ext>
               </a:extLst>
             </p:cNvPr>
-            <p:cNvCxnSpPr>
-              <a:cxnSpLocks/>
-            </p:cNvCxnSpPr>
+            <p:cNvPicPr>
+              <a:picLocks noChangeAspect="1"/>
+            </p:cNvPicPr>
             <p:nvPr/>
-          </p:nvCxnSpPr>
+          </p:nvPicPr>
+          <p:blipFill rotWithShape="1">
+            <a:blip r:embed="rId6">
+              <a:duotone>
+                <a:schemeClr val="accent4">
+                  <a:shade val="45000"/>
+                  <a:satMod val="135000"/>
+                </a:schemeClr>
+                <a:prstClr val="white"/>
+              </a:duotone>
+            </a:blip>
+            <a:srcRect l="12724" r="56552"/>
+            <a:stretch/>
+          </p:blipFill>
           <p:spPr>
-            <a:xfrm>
-              <a:off x="3529947" y="3859139"/>
-              <a:ext cx="1828001" cy="0"/>
+            <a:xfrm rot="5400000">
+              <a:off x="1190773" y="801921"/>
+              <a:ext cx="264710" cy="380212"/>
             </a:xfrm>
-            <a:prstGeom prst="line">
+            <a:prstGeom prst="rect">
               <a:avLst/>
             </a:prstGeom>
-            <a:ln w="38100">
-              <a:headEnd type="none" w="sm" len="sm"/>
-              <a:tailEnd type="stealth" w="lg" len="lg"/>
-            </a:ln>
           </p:spPr>
-          <p:style>
-            <a:lnRef idx="3">
-              <a:schemeClr val="dk1"/>
-            </a:lnRef>
-            <a:fillRef idx="0">
-              <a:schemeClr val="dk1"/>
-            </a:fillRef>
-            <a:effectRef idx="2">
-              <a:schemeClr val="dk1"/>
-            </a:effectRef>
-            <a:fontRef idx="minor">
-              <a:schemeClr val="tx1"/>
-            </a:fontRef>
-          </p:style>
-        </p:cxnSp>
-        <p:cxnSp>
-          <p:nvCxnSpPr>
-            <p:cNvPr id="64" name="直線接點 63">
+        </p:pic>
+        <p:pic>
+          <p:nvPicPr>
+            <p:cNvPr id="47" name="圖片 46">
               <a:extLst>
                 <a:ext uri="{FF2B5EF4-FFF2-40B4-BE49-F238E27FC236}">
-                  <a16:creationId xmlns:a16="http://schemas.microsoft.com/office/drawing/2014/main" id="{A99C7E62-7554-4E77-9C31-CBFD9E4B1D53}"/>
+                  <a16:creationId xmlns:a16="http://schemas.microsoft.com/office/drawing/2014/main" id="{A3A5EAB5-0A6A-47CB-BAEA-C8F400FCB203}"/>
                 </a:ext>
               </a:extLst>
             </p:cNvPr>
-            <p:cNvCxnSpPr>
-              <a:cxnSpLocks/>
-            </p:cNvCxnSpPr>
+            <p:cNvPicPr>
+              <a:picLocks noChangeAspect="1"/>
+            </p:cNvPicPr>
             <p:nvPr/>
-          </p:nvCxnSpPr>
+          </p:nvPicPr>
+          <p:blipFill rotWithShape="1">
+            <a:blip r:embed="rId6">
+              <a:duotone>
+                <a:schemeClr val="accent4">
+                  <a:shade val="45000"/>
+                  <a:satMod val="135000"/>
+                </a:schemeClr>
+                <a:prstClr val="white"/>
+              </a:duotone>
+            </a:blip>
+            <a:srcRect l="12870"/>
+            <a:stretch/>
+          </p:blipFill>
           <p:spPr>
-            <a:xfrm flipH="1">
-              <a:off x="2874643" y="3846439"/>
-              <a:ext cx="680704" cy="778072"/>
+            <a:xfrm rot="5400000">
+              <a:off x="947773" y="1304588"/>
+              <a:ext cx="750708" cy="380212"/>
             </a:xfrm>
-            <a:prstGeom prst="line">
+            <a:prstGeom prst="rect">
               <a:avLst/>
             </a:prstGeom>
-            <a:ln w="38100">
-              <a:headEnd type="none" w="sm" len="sm"/>
-              <a:tailEnd type="stealth" w="lg" len="lg"/>
-            </a:ln>
           </p:spPr>
-          <p:style>
-            <a:lnRef idx="3">
-              <a:schemeClr val="dk1"/>
-            </a:lnRef>
-            <a:fillRef idx="0">
-              <a:schemeClr val="dk1"/>
-            </a:fillRef>
-            <a:effectRef idx="2">
-              <a:schemeClr val="dk1"/>
-            </a:effectRef>
-            <a:fontRef idx="minor">
-              <a:schemeClr val="tx1"/>
-            </a:fontRef>
-          </p:style>
-        </p:cxnSp>
-        <p:cxnSp>
-          <p:nvCxnSpPr>
-            <p:cNvPr id="67" name="直線接點 66">
+        </p:pic>
+        <p:pic>
+          <p:nvPicPr>
+            <p:cNvPr id="48" name="圖片 47">
               <a:extLst>
                 <a:ext uri="{FF2B5EF4-FFF2-40B4-BE49-F238E27FC236}">
-                  <a16:creationId xmlns:a16="http://schemas.microsoft.com/office/drawing/2014/main" id="{F9B51E7A-D0E3-456A-8AFF-CFC0CB46E4BB}"/>
+                  <a16:creationId xmlns:a16="http://schemas.microsoft.com/office/drawing/2014/main" id="{CFE2C17E-13AF-4498-816D-C23146CF22E2}"/>
                 </a:ext>
               </a:extLst>
             </p:cNvPr>
-            <p:cNvCxnSpPr>
-              <a:cxnSpLocks/>
-            </p:cNvCxnSpPr>
+            <p:cNvPicPr>
+              <a:picLocks noChangeAspect="1"/>
+            </p:cNvPicPr>
             <p:nvPr/>
-          </p:nvCxnSpPr>
+          </p:nvPicPr>
+          <p:blipFill rotWithShape="1">
+            <a:blip r:embed="rId6">
+              <a:duotone>
+                <a:schemeClr val="accent4">
+                  <a:shade val="45000"/>
+                  <a:satMod val="135000"/>
+                </a:schemeClr>
+                <a:prstClr val="white"/>
+              </a:duotone>
+            </a:blip>
+            <a:srcRect l="12724" r="56552"/>
+            <a:stretch/>
+          </p:blipFill>
           <p:spPr>
-            <a:xfrm>
-              <a:off x="3529947" y="2595539"/>
-              <a:ext cx="0" cy="1263600"/>
+            <a:xfrm rot="5400000">
+              <a:off x="1190773" y="541348"/>
+              <a:ext cx="264710" cy="380212"/>
             </a:xfrm>
-            <a:prstGeom prst="line">
+            <a:prstGeom prst="rect">
               <a:avLst/>
             </a:prstGeom>
-            <a:ln w="38100">
-              <a:headEnd type="stealth" w="lg" len="lg"/>
-              <a:tailEnd type="none" w="lg" len="lg"/>
-            </a:ln>
           </p:spPr>
-          <p:style>
-            <a:lnRef idx="3">
-              <a:schemeClr val="dk1"/>
-            </a:lnRef>
-            <a:fillRef idx="0">
-              <a:schemeClr val="dk1"/>
-            </a:fillRef>
-            <a:effectRef idx="2">
-              <a:schemeClr val="dk1"/>
-            </a:effectRef>
-            <a:fontRef idx="minor">
-              <a:schemeClr val="tx1"/>
-            </a:fontRef>
-          </p:style>
-        </p:cxnSp>
-        <mc:AlternateContent xmlns:mc="http://schemas.openxmlformats.org/markup-compatibility/2006" xmlns:a14="http://schemas.microsoft.com/office/drawing/2010/main">
-          <mc:Choice Requires="a14">
-            <p:sp>
-              <p:nvSpPr>
-                <p:cNvPr id="69" name="文字方塊 68">
-                  <a:extLst>
-                    <a:ext uri="{FF2B5EF4-FFF2-40B4-BE49-F238E27FC236}">
-                      <a16:creationId xmlns:a16="http://schemas.microsoft.com/office/drawing/2014/main" id="{A381AF93-E1EE-4C2E-A51E-34BEBBBB2DBB}"/>
-                    </a:ext>
-                  </a:extLst>
-                </p:cNvPr>
-                <p:cNvSpPr txBox="1"/>
-                <p:nvPr/>
-              </p:nvSpPr>
-              <p:spPr>
-                <a:xfrm>
-                  <a:off x="3314067" y="2152918"/>
-                  <a:ext cx="499134" cy="492443"/>
-                </a:xfrm>
-                <a:prstGeom prst="rect">
-                  <a:avLst/>
-                </a:prstGeom>
-                <a:noFill/>
-              </p:spPr>
-              <p:txBody>
-                <a:bodyPr wrap="square" rtlCol="0">
-                  <a:spAutoFit/>
-                </a:bodyPr>
-                <a:lstStyle/>
-                <a:p>
-                  <a:pPr/>
-                  <a14:m>
-                    <m:oMathPara xmlns:m="http://schemas.openxmlformats.org/officeDocument/2006/math">
-                      <m:oMathParaPr>
-                        <m:jc m:val="centerGroup"/>
-                      </m:oMathParaPr>
-                      <m:oMath xmlns:m="http://schemas.openxmlformats.org/officeDocument/2006/math">
-                        <m:sSub>
-                          <m:sSubPr>
-                            <m:ctrlPr>
-                              <a:rPr lang="en-US" altLang="zh-TW" sz="2600" i="1" smtClean="0">
-                                <a:latin typeface="Cambria Math" panose="02040503050406030204" pitchFamily="18" charset="0"/>
-                              </a:rPr>
-                            </m:ctrlPr>
-                          </m:sSubPr>
-                          <m:e>
-                            <m:r>
-                              <a:rPr lang="en-US" altLang="zh-TW" sz="2600" b="1" i="1">
-                                <a:latin typeface="Cambria Math" panose="02040503050406030204" pitchFamily="18" charset="0"/>
-                              </a:rPr>
-                              <m:t>𝒒</m:t>
-                            </m:r>
-                          </m:e>
-                          <m:sub>
-                            <m:r>
-                              <a:rPr lang="en-US" altLang="zh-TW" sz="2600" b="0" i="1" smtClean="0">
-                                <a:latin typeface="Cambria Math" panose="02040503050406030204" pitchFamily="18" charset="0"/>
-                              </a:rPr>
-                              <m:t>𝑥</m:t>
-                            </m:r>
-                          </m:sub>
-                        </m:sSub>
-                      </m:oMath>
-                    </m:oMathPara>
-                  </a14:m>
-                  <a:endParaRPr lang="zh-TW" altLang="en-US" sz="2600" dirty="0">
-                    <a:latin typeface="Times New Roman" panose="02020603050405020304" pitchFamily="18" charset="0"/>
-                    <a:cs typeface="Times New Roman" panose="02020603050405020304" pitchFamily="18" charset="0"/>
-                  </a:endParaRPr>
-                </a:p>
-              </p:txBody>
-            </p:sp>
-          </mc:Choice>
-          <mc:Fallback xmlns="">
-            <p:sp>
-              <p:nvSpPr>
-                <p:cNvPr id="69" name="文字方塊 68">
-                  <a:extLst>
-                    <a:ext uri="{FF2B5EF4-FFF2-40B4-BE49-F238E27FC236}">
-                      <a16:creationId xmlns:a16="http://schemas.microsoft.com/office/drawing/2014/main" id="{A381AF93-E1EE-4C2E-A51E-34BEBBBB2DBB}"/>
-                    </a:ext>
-                  </a:extLst>
-                </p:cNvPr>
-                <p:cNvSpPr txBox="1">
-                  <a:spLocks noRot="1" noChangeAspect="1" noMove="1" noResize="1" noEditPoints="1" noAdjustHandles="1" noChangeArrowheads="1" noChangeShapeType="1" noTextEdit="1"/>
-                </p:cNvSpPr>
-                <p:nvPr/>
-              </p:nvSpPr>
-              <p:spPr>
-                <a:xfrm>
-                  <a:off x="3314067" y="2152918"/>
-                  <a:ext cx="499134" cy="492443"/>
-                </a:xfrm>
-                <a:prstGeom prst="rect">
-                  <a:avLst/>
-                </a:prstGeom>
-                <a:blipFill>
-                  <a:blip r:embed="rId2"/>
-                  <a:stretch>
-                    <a:fillRect/>
-                  </a:stretch>
-                </a:blipFill>
-              </p:spPr>
-              <p:txBody>
-                <a:bodyPr/>
-                <a:lstStyle/>
-                <a:p>
-                  <a:r>
-                    <a:rPr lang="zh-TW" altLang="en-US">
-                      <a:noFill/>
-                    </a:rPr>
-                    <a:t> </a:t>
-                  </a:r>
-                </a:p>
-              </p:txBody>
-            </p:sp>
-          </mc:Fallback>
-        </mc:AlternateContent>
-        <mc:AlternateContent xmlns:mc="http://schemas.openxmlformats.org/markup-compatibility/2006" xmlns:a14="http://schemas.microsoft.com/office/drawing/2010/main">
-          <mc:Choice Requires="a14">
-            <p:sp>
-              <p:nvSpPr>
-                <p:cNvPr id="70" name="文字方塊 69">
-                  <a:extLst>
-                    <a:ext uri="{FF2B5EF4-FFF2-40B4-BE49-F238E27FC236}">
-                      <a16:creationId xmlns:a16="http://schemas.microsoft.com/office/drawing/2014/main" id="{6CE79A81-1D77-4F04-AF6B-2D5D313FDCF6}"/>
-                    </a:ext>
-                  </a:extLst>
-                </p:cNvPr>
-                <p:cNvSpPr txBox="1"/>
-                <p:nvPr/>
-              </p:nvSpPr>
-              <p:spPr>
-                <a:xfrm>
-                  <a:off x="2499058" y="4452170"/>
-                  <a:ext cx="499134" cy="524054"/>
-                </a:xfrm>
-                <a:prstGeom prst="rect">
-                  <a:avLst/>
-                </a:prstGeom>
-                <a:noFill/>
-              </p:spPr>
-              <p:txBody>
-                <a:bodyPr wrap="square" rtlCol="0">
-                  <a:spAutoFit/>
-                </a:bodyPr>
-                <a:lstStyle/>
-                <a:p>
-                  <a:pPr/>
-                  <a14:m>
-                    <m:oMathPara xmlns:m="http://schemas.openxmlformats.org/officeDocument/2006/math">
-                      <m:oMathParaPr>
-                        <m:jc m:val="centerGroup"/>
-                      </m:oMathParaPr>
-                      <m:oMath xmlns:m="http://schemas.openxmlformats.org/officeDocument/2006/math">
-                        <m:sSub>
-                          <m:sSubPr>
-                            <m:ctrlPr>
-                              <a:rPr lang="en-US" altLang="zh-TW" sz="2600" i="1" smtClean="0">
-                                <a:latin typeface="Cambria Math" panose="02040503050406030204" pitchFamily="18" charset="0"/>
-                              </a:rPr>
-                            </m:ctrlPr>
-                          </m:sSubPr>
-                          <m:e>
-                            <m:r>
-                              <a:rPr lang="en-US" altLang="zh-TW" sz="2600" b="1" i="1">
-                                <a:latin typeface="Cambria Math" panose="02040503050406030204" pitchFamily="18" charset="0"/>
-                              </a:rPr>
-                              <m:t>𝒒</m:t>
-                            </m:r>
-                          </m:e>
-                          <m:sub>
-                            <m:r>
-                              <a:rPr lang="en-US" altLang="zh-TW" sz="2600" b="0" i="1" smtClean="0">
-                                <a:latin typeface="Cambria Math" panose="02040503050406030204" pitchFamily="18" charset="0"/>
-                              </a:rPr>
-                              <m:t>𝑦</m:t>
-                            </m:r>
-                          </m:sub>
-                        </m:sSub>
-                      </m:oMath>
-                    </m:oMathPara>
-                  </a14:m>
-                  <a:endParaRPr lang="zh-TW" altLang="en-US" sz="2600" dirty="0">
-                    <a:latin typeface="Times New Roman" panose="02020603050405020304" pitchFamily="18" charset="0"/>
-                    <a:cs typeface="Times New Roman" panose="02020603050405020304" pitchFamily="18" charset="0"/>
-                  </a:endParaRPr>
-                </a:p>
-              </p:txBody>
-            </p:sp>
-          </mc:Choice>
-          <mc:Fallback xmlns="">
-            <p:sp>
-              <p:nvSpPr>
-                <p:cNvPr id="70" name="文字方塊 69">
-                  <a:extLst>
-                    <a:ext uri="{FF2B5EF4-FFF2-40B4-BE49-F238E27FC236}">
-                      <a16:creationId xmlns:a16="http://schemas.microsoft.com/office/drawing/2014/main" id="{6CE79A81-1D77-4F04-AF6B-2D5D313FDCF6}"/>
-                    </a:ext>
-                  </a:extLst>
-                </p:cNvPr>
-                <p:cNvSpPr txBox="1">
-                  <a:spLocks noRot="1" noChangeAspect="1" noMove="1" noResize="1" noEditPoints="1" noAdjustHandles="1" noChangeArrowheads="1" noChangeShapeType="1" noTextEdit="1"/>
-                </p:cNvSpPr>
-                <p:nvPr/>
-              </p:nvSpPr>
-              <p:spPr>
-                <a:xfrm>
-                  <a:off x="2499058" y="4452170"/>
-                  <a:ext cx="499134" cy="524054"/>
-                </a:xfrm>
-                <a:prstGeom prst="rect">
-                  <a:avLst/>
-                </a:prstGeom>
-                <a:blipFill>
-                  <a:blip r:embed="rId3"/>
-                  <a:stretch>
-                    <a:fillRect/>
-                  </a:stretch>
-                </a:blipFill>
-              </p:spPr>
-              <p:txBody>
-                <a:bodyPr/>
-                <a:lstStyle/>
-                <a:p>
-                  <a:r>
-                    <a:rPr lang="zh-TW" altLang="en-US">
-                      <a:noFill/>
-                    </a:rPr>
-                    <a:t> </a:t>
-                  </a:r>
-                </a:p>
-              </p:txBody>
-            </p:sp>
-          </mc:Fallback>
-        </mc:AlternateContent>
-        <mc:AlternateContent xmlns:mc="http://schemas.openxmlformats.org/markup-compatibility/2006" xmlns:a14="http://schemas.microsoft.com/office/drawing/2010/main">
-          <mc:Choice Requires="a14">
-            <p:sp>
-              <p:nvSpPr>
-                <p:cNvPr id="71" name="文字方塊 70">
-                  <a:extLst>
-                    <a:ext uri="{FF2B5EF4-FFF2-40B4-BE49-F238E27FC236}">
-                      <a16:creationId xmlns:a16="http://schemas.microsoft.com/office/drawing/2014/main" id="{F758FAE2-DCF9-434C-8834-4F4BA34DC3B8}"/>
-                    </a:ext>
-                  </a:extLst>
-                </p:cNvPr>
-                <p:cNvSpPr txBox="1"/>
-                <p:nvPr/>
-              </p:nvSpPr>
-              <p:spPr>
-                <a:xfrm>
-                  <a:off x="5421825" y="3637161"/>
-                  <a:ext cx="499134" cy="492443"/>
-                </a:xfrm>
-                <a:prstGeom prst="rect">
-                  <a:avLst/>
-                </a:prstGeom>
-                <a:noFill/>
-              </p:spPr>
-              <p:txBody>
-                <a:bodyPr wrap="square" rtlCol="0">
-                  <a:spAutoFit/>
-                </a:bodyPr>
-                <a:lstStyle/>
-                <a:p>
-                  <a:pPr/>
-                  <a14:m>
-                    <m:oMathPara xmlns:m="http://schemas.openxmlformats.org/officeDocument/2006/math">
-                      <m:oMathParaPr>
-                        <m:jc m:val="centerGroup"/>
-                      </m:oMathParaPr>
-                      <m:oMath xmlns:m="http://schemas.openxmlformats.org/officeDocument/2006/math">
-                        <m:sSub>
-                          <m:sSubPr>
-                            <m:ctrlPr>
-                              <a:rPr lang="en-US" altLang="zh-TW" sz="2600" i="1" smtClean="0">
-                                <a:latin typeface="Cambria Math" panose="02040503050406030204" pitchFamily="18" charset="0"/>
-                              </a:rPr>
-                            </m:ctrlPr>
-                          </m:sSubPr>
-                          <m:e>
-                            <m:r>
-                              <a:rPr lang="en-US" altLang="zh-TW" sz="2600" b="1" i="1">
-                                <a:latin typeface="Cambria Math" panose="02040503050406030204" pitchFamily="18" charset="0"/>
-                              </a:rPr>
-                              <m:t>𝒒</m:t>
-                            </m:r>
-                          </m:e>
-                          <m:sub>
-                            <m:r>
-                              <a:rPr lang="en-US" altLang="zh-TW" sz="2600" b="0" i="1" smtClean="0">
-                                <a:latin typeface="Cambria Math" panose="02040503050406030204" pitchFamily="18" charset="0"/>
-                              </a:rPr>
-                              <m:t>𝑧</m:t>
-                            </m:r>
-                          </m:sub>
-                        </m:sSub>
-                      </m:oMath>
-                    </m:oMathPara>
-                  </a14:m>
-                  <a:endParaRPr lang="zh-TW" altLang="en-US" sz="2600" dirty="0">
-                    <a:latin typeface="Times New Roman" panose="02020603050405020304" pitchFamily="18" charset="0"/>
-                    <a:cs typeface="Times New Roman" panose="02020603050405020304" pitchFamily="18" charset="0"/>
-                  </a:endParaRPr>
-                </a:p>
-              </p:txBody>
-            </p:sp>
-          </mc:Choice>
-          <mc:Fallback xmlns="">
-            <p:sp>
-              <p:nvSpPr>
-                <p:cNvPr id="71" name="文字方塊 70">
-                  <a:extLst>
-                    <a:ext uri="{FF2B5EF4-FFF2-40B4-BE49-F238E27FC236}">
-                      <a16:creationId xmlns:a16="http://schemas.microsoft.com/office/drawing/2014/main" id="{F758FAE2-DCF9-434C-8834-4F4BA34DC3B8}"/>
-                    </a:ext>
-                  </a:extLst>
-                </p:cNvPr>
-                <p:cNvSpPr txBox="1">
-                  <a:spLocks noRot="1" noChangeAspect="1" noMove="1" noResize="1" noEditPoints="1" noAdjustHandles="1" noChangeArrowheads="1" noChangeShapeType="1" noTextEdit="1"/>
-                </p:cNvSpPr>
-                <p:nvPr/>
-              </p:nvSpPr>
-              <p:spPr>
-                <a:xfrm>
-                  <a:off x="5421825" y="3637161"/>
-                  <a:ext cx="499134" cy="492443"/>
-                </a:xfrm>
-                <a:prstGeom prst="rect">
-                  <a:avLst/>
-                </a:prstGeom>
-                <a:blipFill>
-                  <a:blip r:embed="rId4"/>
-                  <a:stretch>
-                    <a:fillRect/>
-                  </a:stretch>
-                </a:blipFill>
-              </p:spPr>
-              <p:txBody>
-                <a:bodyPr/>
-                <a:lstStyle/>
-                <a:p>
-                  <a:r>
-                    <a:rPr lang="zh-TW" altLang="en-US">
-                      <a:noFill/>
-                    </a:rPr>
-                    <a:t> </a:t>
-                  </a:r>
-                </a:p>
-              </p:txBody>
-            </p:sp>
-          </mc:Fallback>
-        </mc:AlternateContent>
-        <mc:AlternateContent xmlns:mc="http://schemas.openxmlformats.org/markup-compatibility/2006" xmlns:a14="http://schemas.microsoft.com/office/drawing/2010/main">
-          <mc:Choice Requires="a14">
-            <p:sp>
-              <p:nvSpPr>
-                <p:cNvPr id="87" name="文字方塊 86">
-                  <a:extLst>
-                    <a:ext uri="{FF2B5EF4-FFF2-40B4-BE49-F238E27FC236}">
-                      <a16:creationId xmlns:a16="http://schemas.microsoft.com/office/drawing/2014/main" id="{56384483-2913-4BE8-AC0A-5F15247C44FF}"/>
-                    </a:ext>
-                  </a:extLst>
-                </p:cNvPr>
-                <p:cNvSpPr txBox="1"/>
-                <p:nvPr/>
-              </p:nvSpPr>
-              <p:spPr>
-                <a:xfrm>
-                  <a:off x="4641213" y="3174659"/>
-                  <a:ext cx="568301" cy="492443"/>
-                </a:xfrm>
-                <a:prstGeom prst="rect">
-                  <a:avLst/>
-                </a:prstGeom>
-                <a:noFill/>
-              </p:spPr>
-              <p:txBody>
-                <a:bodyPr wrap="square" rtlCol="0">
-                  <a:spAutoFit/>
-                </a:bodyPr>
-                <a:lstStyle/>
-                <a:p>
-                  <a:pPr/>
-                  <a14:m>
-                    <m:oMathPara xmlns:m="http://schemas.openxmlformats.org/officeDocument/2006/math">
-                      <m:oMathParaPr>
-                        <m:jc m:val="centerGroup"/>
-                      </m:oMathParaPr>
-                      <m:oMath xmlns:m="http://schemas.openxmlformats.org/officeDocument/2006/math">
-                        <m:sSub>
-                          <m:sSubPr>
-                            <m:ctrlPr>
-                              <a:rPr lang="en-US" altLang="zh-TW" sz="2600" b="0" i="1" smtClean="0">
-                                <a:solidFill>
-                                  <a:srgbClr val="DCAC36"/>
-                                </a:solidFill>
-                                <a:latin typeface="Cambria Math" panose="02040503050406030204" pitchFamily="18" charset="0"/>
-                              </a:rPr>
-                            </m:ctrlPr>
-                          </m:sSubPr>
-                          <m:e>
-                            <m:r>
-                              <a:rPr lang="en-US" altLang="zh-TW" sz="2600" b="1" i="1" smtClean="0">
-                                <a:solidFill>
-                                  <a:srgbClr val="DCAC36"/>
-                                </a:solidFill>
-                                <a:latin typeface="Cambria Math" panose="02040503050406030204" pitchFamily="18" charset="0"/>
-                              </a:rPr>
-                              <m:t>𝒒</m:t>
-                            </m:r>
-                          </m:e>
-                          <m:sub>
-                            <m:r>
-                              <a:rPr lang="en-US" altLang="zh-TW" sz="2600" b="0" i="1" smtClean="0">
-                                <a:solidFill>
-                                  <a:srgbClr val="DCAC36"/>
-                                </a:solidFill>
-                                <a:latin typeface="Cambria Math" panose="02040503050406030204" pitchFamily="18" charset="0"/>
-                              </a:rPr>
-                              <m:t>0</m:t>
-                            </m:r>
-                          </m:sub>
-                        </m:sSub>
-                      </m:oMath>
-                    </m:oMathPara>
-                  </a14:m>
-                  <a:endParaRPr lang="zh-TW" altLang="en-US" sz="2600" dirty="0">
-                    <a:latin typeface="Times New Roman" panose="02020603050405020304" pitchFamily="18" charset="0"/>
-                    <a:cs typeface="Times New Roman" panose="02020603050405020304" pitchFamily="18" charset="0"/>
-                  </a:endParaRPr>
-                </a:p>
-              </p:txBody>
-            </p:sp>
-          </mc:Choice>
-          <mc:Fallback xmlns="">
-            <p:sp>
-              <p:nvSpPr>
-                <p:cNvPr id="87" name="文字方塊 86">
-                  <a:extLst>
-                    <a:ext uri="{FF2B5EF4-FFF2-40B4-BE49-F238E27FC236}">
-                      <a16:creationId xmlns:a16="http://schemas.microsoft.com/office/drawing/2014/main" id="{56384483-2913-4BE8-AC0A-5F15247C44FF}"/>
-                    </a:ext>
-                  </a:extLst>
-                </p:cNvPr>
-                <p:cNvSpPr txBox="1">
-                  <a:spLocks noRot="1" noChangeAspect="1" noMove="1" noResize="1" noEditPoints="1" noAdjustHandles="1" noChangeArrowheads="1" noChangeShapeType="1" noTextEdit="1"/>
-                </p:cNvSpPr>
-                <p:nvPr/>
-              </p:nvSpPr>
-              <p:spPr>
-                <a:xfrm>
-                  <a:off x="4641213" y="3174659"/>
-                  <a:ext cx="568301" cy="492443"/>
-                </a:xfrm>
-                <a:prstGeom prst="rect">
-                  <a:avLst/>
-                </a:prstGeom>
-                <a:blipFill>
-                  <a:blip r:embed="rId5"/>
-                  <a:stretch>
-                    <a:fillRect/>
-                  </a:stretch>
-                </a:blipFill>
-              </p:spPr>
-              <p:txBody>
-                <a:bodyPr/>
-                <a:lstStyle/>
-                <a:p>
-                  <a:r>
-                    <a:rPr lang="zh-TW" altLang="en-US">
-                      <a:noFill/>
-                    </a:rPr>
-                    <a:t> </a:t>
-                  </a:r>
-                </a:p>
-              </p:txBody>
-            </p:sp>
-          </mc:Fallback>
-        </mc:AlternateContent>
-        <p:grpSp>
-          <p:nvGrpSpPr>
-            <p:cNvPr id="45" name="群組 44">
-              <a:extLst>
-                <a:ext uri="{FF2B5EF4-FFF2-40B4-BE49-F238E27FC236}">
-                  <a16:creationId xmlns:a16="http://schemas.microsoft.com/office/drawing/2014/main" id="{10715250-2128-407F-A045-4775B6464E3E}"/>
-                </a:ext>
-              </a:extLst>
-            </p:cNvPr>
-            <p:cNvGrpSpPr/>
-            <p:nvPr/>
-          </p:nvGrpSpPr>
-          <p:grpSpPr>
-            <a:xfrm rot="-5400000">
-              <a:off x="4043841" y="3100231"/>
-              <a:ext cx="702702" cy="1506834"/>
-              <a:chOff x="1133021" y="599099"/>
-              <a:chExt cx="380213" cy="1270949"/>
-            </a:xfrm>
-          </p:grpSpPr>
-          <p:pic>
-            <p:nvPicPr>
-              <p:cNvPr id="46" name="圖片 45">
-                <a:extLst>
-                  <a:ext uri="{FF2B5EF4-FFF2-40B4-BE49-F238E27FC236}">
-                    <a16:creationId xmlns:a16="http://schemas.microsoft.com/office/drawing/2014/main" id="{CE72AB36-17D2-40E6-9818-43D5B168917F}"/>
-                  </a:ext>
-                </a:extLst>
-              </p:cNvPr>
-              <p:cNvPicPr>
-                <a:picLocks noChangeAspect="1"/>
-              </p:cNvPicPr>
-              <p:nvPr/>
-            </p:nvPicPr>
-            <p:blipFill rotWithShape="1">
-              <a:blip r:embed="rId6">
-                <a:duotone>
-                  <a:schemeClr val="accent4">
-                    <a:shade val="45000"/>
-                    <a:satMod val="135000"/>
-                  </a:schemeClr>
-                  <a:prstClr val="white"/>
-                </a:duotone>
-              </a:blip>
-              <a:srcRect l="12724" r="56552"/>
-              <a:stretch/>
-            </p:blipFill>
-            <p:spPr>
-              <a:xfrm rot="5400000">
-                <a:off x="1190773" y="801921"/>
-                <a:ext cx="264710" cy="380212"/>
-              </a:xfrm>
-              <a:prstGeom prst="rect">
-                <a:avLst/>
-              </a:prstGeom>
-            </p:spPr>
-          </p:pic>
-          <p:pic>
-            <p:nvPicPr>
-              <p:cNvPr id="47" name="圖片 46">
-                <a:extLst>
-                  <a:ext uri="{FF2B5EF4-FFF2-40B4-BE49-F238E27FC236}">
-                    <a16:creationId xmlns:a16="http://schemas.microsoft.com/office/drawing/2014/main" id="{A3A5EAB5-0A6A-47CB-BAEA-C8F400FCB203}"/>
-                  </a:ext>
-                </a:extLst>
-              </p:cNvPr>
-              <p:cNvPicPr>
-                <a:picLocks noChangeAspect="1"/>
-              </p:cNvPicPr>
-              <p:nvPr/>
-            </p:nvPicPr>
-            <p:blipFill rotWithShape="1">
-              <a:blip r:embed="rId6">
-                <a:duotone>
-                  <a:schemeClr val="accent4">
-                    <a:shade val="45000"/>
-                    <a:satMod val="135000"/>
-                  </a:schemeClr>
-                  <a:prstClr val="white"/>
-                </a:duotone>
-              </a:blip>
-              <a:srcRect l="12870"/>
-              <a:stretch/>
-            </p:blipFill>
-            <p:spPr>
-              <a:xfrm rot="5400000">
-                <a:off x="947773" y="1304588"/>
-                <a:ext cx="750708" cy="380212"/>
-              </a:xfrm>
-              <a:prstGeom prst="rect">
-                <a:avLst/>
-              </a:prstGeom>
-            </p:spPr>
-          </p:pic>
-          <p:pic>
-            <p:nvPicPr>
-              <p:cNvPr id="48" name="圖片 47">
-                <a:extLst>
-                  <a:ext uri="{FF2B5EF4-FFF2-40B4-BE49-F238E27FC236}">
-                    <a16:creationId xmlns:a16="http://schemas.microsoft.com/office/drawing/2014/main" id="{CFE2C17E-13AF-4498-816D-C23146CF22E2}"/>
-                  </a:ext>
-                </a:extLst>
-              </p:cNvPr>
-              <p:cNvPicPr>
-                <a:picLocks noChangeAspect="1"/>
-              </p:cNvPicPr>
-              <p:nvPr/>
-            </p:nvPicPr>
-            <p:blipFill rotWithShape="1">
-              <a:blip r:embed="rId6">
-                <a:duotone>
-                  <a:schemeClr val="accent4">
-                    <a:shade val="45000"/>
-                    <a:satMod val="135000"/>
-                  </a:schemeClr>
-                  <a:prstClr val="white"/>
-                </a:duotone>
-              </a:blip>
-              <a:srcRect l="12724" r="56552"/>
-              <a:stretch/>
-            </p:blipFill>
-            <p:spPr>
-              <a:xfrm rot="5400000">
-                <a:off x="1190773" y="541348"/>
-                <a:ext cx="264710" cy="380212"/>
-              </a:xfrm>
-              <a:prstGeom prst="rect">
-                <a:avLst/>
-              </a:prstGeom>
-            </p:spPr>
-          </p:pic>
-        </p:grpSp>
+        </p:pic>
       </p:grpSp>
     </p:spTree>
     <p:extLst>
